--- a/Presentation.pptx
+++ b/Presentation.pptx
@@ -8116,32 +8116,9 @@
         <p:spPr/>
         <p:txBody>
           <a:bodyPr>
-            <a:normAutofit fontScale="92500" lnSpcReduction="10000"/>
+            <a:normAutofit/>
           </a:bodyPr>
           <a:lstStyle/>
-          <a:p>
-            <a:pPr algn="l"/>
-            <a:r>
-              <a:rPr lang="en-IN" b="1" dirty="0"/>
-              <a:t>Capstone Project: </a:t>
-            </a:r>
-            <a:r>
-              <a:rPr lang="en-IN" dirty="0"/>
-              <a:t>Data Analytics with GenAI</a:t>
-            </a:r>
-          </a:p>
-          <a:p>
-            <a:pPr algn="l"/>
-            <a:r>
-              <a:rPr lang="en-IN" b="1" dirty="0"/>
-              <a:t>Role: </a:t>
-            </a:r>
-            <a:r>
-              <a:rPr lang="en-IN" dirty="0"/>
-              <a:t>Financial Analytics Consultant</a:t>
-            </a:r>
-            <a:endParaRPr lang="en-IN" b="1" dirty="0"/>
-          </a:p>
           <a:p>
             <a:pPr algn="l"/>
             <a:r>
